--- a/deck/FinOps_for_AI_CIO.pptx
+++ b/deck/FinOps_for_AI_CIO.pptx
@@ -2199,11 +2199,883 @@
         </p:nvSpPr>
         <p:spPr>
           <a:xfrm>
-            <a:off x="457200" y="1536192"/>
-            <a:ext cx="329184" cy="329184"/>
+            <a:off x="457200" y="1517904"/>
+            <a:ext cx="512064" cy="512064"/>
           </a:xfrm>
           <a:prstGeom prst="ellipse">
             <a:avLst/>
+          </a:prstGeom>
+          <a:solidFill>
+            <a:srgbClr val="121B2D"/>
+          </a:solidFill>
+          <a:ln w="15875">
+            <a:solidFill>
+              <a:srgbClr val="3DD9EB"/>
+            </a:solidFill>
+            <a:prstDash val="solid"/>
+          </a:ln>
+        </p:spPr>
+      </p:sp>
+      <p:sp>
+        <p:nvSpPr>
+          <p:cNvPr id="8" name="Text 6"/>
+          <p:cNvSpPr/>
+          <p:nvPr/>
+        </p:nvSpPr>
+        <p:spPr>
+          <a:xfrm>
+            <a:off x="457200" y="1517904"/>
+            <a:ext cx="512064" cy="512064"/>
+          </a:xfrm>
+          <a:prstGeom prst="rect">
+            <a:avLst/>
+          </a:prstGeom>
+          <a:noFill/>
+          <a:ln/>
+        </p:spPr>
+        <p:txBody>
+          <a:bodyPr wrap="square" lIns="0" tIns="0" rIns="0" bIns="0" rtlCol="0" anchor="ctr"/>
+          <a:lstStyle/>
+          <a:p>
+            <a:pPr algn="ctr" indent="0" marL="0">
+              <a:buNone/>
+            </a:pPr>
+            <a:r>
+              <a:rPr lang="en-US" sz="2000" b="1" dirty="0">
+                <a:solidFill>
+                  <a:srgbClr val="3DD9EB"/>
+                </a:solidFill>
+                <a:latin typeface="Calibri" pitchFamily="34" charset="0"/>
+                <a:ea typeface="Calibri" pitchFamily="34" charset="-122"/>
+                <a:cs typeface="Calibri" pitchFamily="34" charset="-120"/>
+              </a:rPr>
+              <a:t>1</a:t>
+            </a:r>
+            <a:endParaRPr lang="en-US" sz="2000" dirty="0"/>
+          </a:p>
+        </p:txBody>
+      </p:sp>
+      <p:sp>
+        <p:nvSpPr>
+          <p:cNvPr id="9" name="Text 7"/>
+          <p:cNvSpPr/>
+          <p:nvPr/>
+        </p:nvSpPr>
+        <p:spPr>
+          <a:xfrm>
+            <a:off x="1115568" y="1463040"/>
+            <a:ext cx="4797400" cy="333375"/>
+          </a:xfrm>
+          <a:prstGeom prst="rect">
+            <a:avLst/>
+          </a:prstGeom>
+          <a:noFill/>
+          <a:ln/>
+        </p:spPr>
+        <p:txBody>
+          <a:bodyPr wrap="square" lIns="0" tIns="0" rIns="0" bIns="0" rtlCol="0" anchor="ctr"/>
+          <a:lstStyle/>
+          <a:p>
+            <a:pPr indent="0" marL="0">
+              <a:buNone/>
+            </a:pPr>
+            <a:r>
+              <a:rPr lang="en-US" sz="2100" b="1" dirty="0">
+                <a:solidFill>
+                  <a:srgbClr val="F4F7FB"/>
+                </a:solidFill>
+                <a:latin typeface="Calibri" pitchFamily="34" charset="0"/>
+                <a:ea typeface="Calibri" pitchFamily="34" charset="-122"/>
+                <a:cs typeface="Calibri" pitchFamily="34" charset="-120"/>
+              </a:rPr>
+              <a:t>Adopt the one-page policy</a:t>
+            </a:r>
+            <a:endParaRPr lang="en-US" sz="2100" dirty="0"/>
+          </a:p>
+        </p:txBody>
+      </p:sp>
+      <p:sp>
+        <p:nvSpPr>
+          <p:cNvPr id="10" name="Text 8"/>
+          <p:cNvSpPr/>
+          <p:nvPr/>
+        </p:nvSpPr>
+        <p:spPr>
+          <a:xfrm>
+            <a:off x="1115568" y="1842135"/>
+            <a:ext cx="4797400" cy="508000"/>
+          </a:xfrm>
+          <a:prstGeom prst="rect">
+            <a:avLst/>
+          </a:prstGeom>
+          <a:noFill/>
+          <a:ln/>
+        </p:spPr>
+        <p:txBody>
+          <a:bodyPr wrap="square" lIns="0" tIns="0" rIns="0" bIns="0" rtlCol="0" anchor="t"/>
+          <a:lstStyle/>
+          <a:p>
+            <a:pPr indent="0" marL="0">
+              <a:lnSpc>
+                <a:spcPct val="112000"/>
+              </a:lnSpc>
+              <a:buNone/>
+            </a:pPr>
+            <a:r>
+              <a:rPr lang="en-US" sz="1600" dirty="0">
+                <a:solidFill>
+                  <a:srgbClr val="91A0B7"/>
+                </a:solidFill>
+                <a:latin typeface="Calibri" pitchFamily="34" charset="0"/>
+                <a:ea typeface="Calibri" pitchFamily="34" charset="-122"/>
+                <a:cs typeface="Calibri" pitchFamily="34" charset="-120"/>
+              </a:rPr>
+              <a:t>As the default for every team building on AI.</a:t>
+            </a:r>
+            <a:endParaRPr lang="en-US" sz="1600" dirty="0"/>
+          </a:p>
+        </p:txBody>
+      </p:sp>
+      <p:sp>
+        <p:nvSpPr>
+          <p:cNvPr id="11" name="Shape 9"/>
+          <p:cNvSpPr/>
+          <p:nvPr/>
+        </p:nvSpPr>
+        <p:spPr>
+          <a:xfrm>
+            <a:off x="457200" y="2610612"/>
+            <a:ext cx="512064" cy="512064"/>
+          </a:xfrm>
+          <a:prstGeom prst="ellipse">
+            <a:avLst/>
+          </a:prstGeom>
+          <a:solidFill>
+            <a:srgbClr val="121B2D"/>
+          </a:solidFill>
+          <a:ln w="15875">
+            <a:solidFill>
+              <a:srgbClr val="3DD9EB"/>
+            </a:solidFill>
+            <a:prstDash val="solid"/>
+          </a:ln>
+        </p:spPr>
+      </p:sp>
+      <p:sp>
+        <p:nvSpPr>
+          <p:cNvPr id="12" name="Text 10"/>
+          <p:cNvSpPr/>
+          <p:nvPr/>
+        </p:nvSpPr>
+        <p:spPr>
+          <a:xfrm>
+            <a:off x="457200" y="2610612"/>
+            <a:ext cx="512064" cy="512064"/>
+          </a:xfrm>
+          <a:prstGeom prst="rect">
+            <a:avLst/>
+          </a:prstGeom>
+          <a:noFill/>
+          <a:ln/>
+        </p:spPr>
+        <p:txBody>
+          <a:bodyPr wrap="square" lIns="0" tIns="0" rIns="0" bIns="0" rtlCol="0" anchor="ctr"/>
+          <a:lstStyle/>
+          <a:p>
+            <a:pPr algn="ctr" indent="0" marL="0">
+              <a:buNone/>
+            </a:pPr>
+            <a:r>
+              <a:rPr lang="en-US" sz="2000" b="1" dirty="0">
+                <a:solidFill>
+                  <a:srgbClr val="3DD9EB"/>
+                </a:solidFill>
+                <a:latin typeface="Calibri" pitchFamily="34" charset="0"/>
+                <a:ea typeface="Calibri" pitchFamily="34" charset="-122"/>
+                <a:cs typeface="Calibri" pitchFamily="34" charset="-120"/>
+              </a:rPr>
+              <a:t>2</a:t>
+            </a:r>
+            <a:endParaRPr lang="en-US" sz="2000" dirty="0"/>
+          </a:p>
+        </p:txBody>
+      </p:sp>
+      <p:sp>
+        <p:nvSpPr>
+          <p:cNvPr id="13" name="Text 11"/>
+          <p:cNvSpPr/>
+          <p:nvPr/>
+        </p:nvSpPr>
+        <p:spPr>
+          <a:xfrm>
+            <a:off x="1115568" y="2555748"/>
+            <a:ext cx="4797400" cy="333375"/>
+          </a:xfrm>
+          <a:prstGeom prst="rect">
+            <a:avLst/>
+          </a:prstGeom>
+          <a:noFill/>
+          <a:ln/>
+        </p:spPr>
+        <p:txBody>
+          <a:bodyPr wrap="square" lIns="0" tIns="0" rIns="0" bIns="0" rtlCol="0" anchor="ctr"/>
+          <a:lstStyle/>
+          <a:p>
+            <a:pPr indent="0" marL="0">
+              <a:buNone/>
+            </a:pPr>
+            <a:r>
+              <a:rPr lang="en-US" sz="2100" b="1" dirty="0">
+                <a:solidFill>
+                  <a:srgbClr val="F4F7FB"/>
+                </a:solidFill>
+                <a:latin typeface="Calibri" pitchFamily="34" charset="0"/>
+                <a:ea typeface="Calibri" pitchFamily="34" charset="-122"/>
+                <a:cs typeface="Calibri" pitchFamily="34" charset="-120"/>
+              </a:rPr>
+              <a:t>Set the tier default</a:t>
+            </a:r>
+            <a:endParaRPr lang="en-US" sz="2100" dirty="0"/>
+          </a:p>
+        </p:txBody>
+      </p:sp>
+      <p:sp>
+        <p:nvSpPr>
+          <p:cNvPr id="14" name="Text 12"/>
+          <p:cNvSpPr/>
+          <p:nvPr/>
+        </p:nvSpPr>
+        <p:spPr>
+          <a:xfrm>
+            <a:off x="1115568" y="2934843"/>
+            <a:ext cx="4797400" cy="508000"/>
+          </a:xfrm>
+          <a:prstGeom prst="rect">
+            <a:avLst/>
+          </a:prstGeom>
+          <a:noFill/>
+          <a:ln/>
+        </p:spPr>
+        <p:txBody>
+          <a:bodyPr wrap="square" lIns="0" tIns="0" rIns="0" bIns="0" rtlCol="0" anchor="t"/>
+          <a:lstStyle/>
+          <a:p>
+            <a:pPr indent="0" marL="0">
+              <a:lnSpc>
+                <a:spcPct val="112000"/>
+              </a:lnSpc>
+              <a:buNone/>
+            </a:pPr>
+            <a:r>
+              <a:rPr lang="en-US" sz="1600" dirty="0">
+                <a:solidFill>
+                  <a:srgbClr val="91A0B7"/>
+                </a:solidFill>
+                <a:latin typeface="Calibri" pitchFamily="34" charset="0"/>
+                <a:ea typeface="Calibri" pitchFamily="34" charset="-122"/>
+                <a:cs typeface="Calibri" pitchFamily="34" charset="-120"/>
+              </a:rPr>
+              <a:t>Balanced tier standard; top tier by exception, with evidence.</a:t>
+            </a:r>
+            <a:endParaRPr lang="en-US" sz="1600" dirty="0"/>
+          </a:p>
+        </p:txBody>
+      </p:sp>
+      <p:sp>
+        <p:nvSpPr>
+          <p:cNvPr id="15" name="Shape 13"/>
+          <p:cNvSpPr/>
+          <p:nvPr/>
+        </p:nvSpPr>
+        <p:spPr>
+          <a:xfrm>
+            <a:off x="457200" y="3703320"/>
+            <a:ext cx="512064" cy="512064"/>
+          </a:xfrm>
+          <a:prstGeom prst="ellipse">
+            <a:avLst/>
+          </a:prstGeom>
+          <a:solidFill>
+            <a:srgbClr val="121B2D"/>
+          </a:solidFill>
+          <a:ln w="15875">
+            <a:solidFill>
+              <a:srgbClr val="3DD9EB"/>
+            </a:solidFill>
+            <a:prstDash val="solid"/>
+          </a:ln>
+        </p:spPr>
+      </p:sp>
+      <p:sp>
+        <p:nvSpPr>
+          <p:cNvPr id="16" name="Text 14"/>
+          <p:cNvSpPr/>
+          <p:nvPr/>
+        </p:nvSpPr>
+        <p:spPr>
+          <a:xfrm>
+            <a:off x="457200" y="3703320"/>
+            <a:ext cx="512064" cy="512064"/>
+          </a:xfrm>
+          <a:prstGeom prst="rect">
+            <a:avLst/>
+          </a:prstGeom>
+          <a:noFill/>
+          <a:ln/>
+        </p:spPr>
+        <p:txBody>
+          <a:bodyPr wrap="square" lIns="0" tIns="0" rIns="0" bIns="0" rtlCol="0" anchor="ctr"/>
+          <a:lstStyle/>
+          <a:p>
+            <a:pPr algn="ctr" indent="0" marL="0">
+              <a:buNone/>
+            </a:pPr>
+            <a:r>
+              <a:rPr lang="en-US" sz="2000" b="1" dirty="0">
+                <a:solidFill>
+                  <a:srgbClr val="3DD9EB"/>
+                </a:solidFill>
+                <a:latin typeface="Calibri" pitchFamily="34" charset="0"/>
+                <a:ea typeface="Calibri" pitchFamily="34" charset="-122"/>
+                <a:cs typeface="Calibri" pitchFamily="34" charset="-120"/>
+              </a:rPr>
+              <a:t>3</a:t>
+            </a:r>
+            <a:endParaRPr lang="en-US" sz="2000" dirty="0"/>
+          </a:p>
+        </p:txBody>
+      </p:sp>
+      <p:sp>
+        <p:nvSpPr>
+          <p:cNvPr id="17" name="Text 15"/>
+          <p:cNvSpPr/>
+          <p:nvPr/>
+        </p:nvSpPr>
+        <p:spPr>
+          <a:xfrm>
+            <a:off x="1115568" y="3648456"/>
+            <a:ext cx="4797400" cy="333375"/>
+          </a:xfrm>
+          <a:prstGeom prst="rect">
+            <a:avLst/>
+          </a:prstGeom>
+          <a:noFill/>
+          <a:ln/>
+        </p:spPr>
+        <p:txBody>
+          <a:bodyPr wrap="square" lIns="0" tIns="0" rIns="0" bIns="0" rtlCol="0" anchor="ctr"/>
+          <a:lstStyle/>
+          <a:p>
+            <a:pPr indent="0" marL="0">
+              <a:buNone/>
+            </a:pPr>
+            <a:r>
+              <a:rPr lang="en-US" sz="2100" b="1" dirty="0">
+                <a:solidFill>
+                  <a:srgbClr val="F4F7FB"/>
+                </a:solidFill>
+                <a:latin typeface="Calibri" pitchFamily="34" charset="0"/>
+                <a:ea typeface="Calibri" pitchFamily="34" charset="-122"/>
+                <a:cs typeface="Calibri" pitchFamily="34" charset="-120"/>
+              </a:rPr>
+              <a:t>Mandate caching</a:t>
+            </a:r>
+            <a:endParaRPr lang="en-US" sz="2100" dirty="0"/>
+          </a:p>
+        </p:txBody>
+      </p:sp>
+      <p:sp>
+        <p:nvSpPr>
+          <p:cNvPr id="18" name="Text 16"/>
+          <p:cNvSpPr/>
+          <p:nvPr/>
+        </p:nvSpPr>
+        <p:spPr>
+          <a:xfrm>
+            <a:off x="1115568" y="4027551"/>
+            <a:ext cx="4797400" cy="508000"/>
+          </a:xfrm>
+          <a:prstGeom prst="rect">
+            <a:avLst/>
+          </a:prstGeom>
+          <a:noFill/>
+          <a:ln/>
+        </p:spPr>
+        <p:txBody>
+          <a:bodyPr wrap="square" lIns="0" tIns="0" rIns="0" bIns="0" rtlCol="0" anchor="t"/>
+          <a:lstStyle/>
+          <a:p>
+            <a:pPr indent="0" marL="0">
+              <a:lnSpc>
+                <a:spcPct val="112000"/>
+              </a:lnSpc>
+              <a:buNone/>
+            </a:pPr>
+            <a:r>
+              <a:rPr lang="en-US" sz="1600" dirty="0">
+                <a:solidFill>
+                  <a:srgbClr val="91A0B7"/>
+                </a:solidFill>
+                <a:latin typeface="Calibri" pitchFamily="34" charset="0"/>
+                <a:ea typeface="Calibri" pitchFamily="34" charset="-122"/>
+                <a:cs typeface="Calibri" pitchFamily="34" charset="-120"/>
+              </a:rPr>
+              <a:t>Stable context cached on assistants and document workloads.</a:t>
+            </a:r>
+            <a:endParaRPr lang="en-US" sz="1600" dirty="0"/>
+          </a:p>
+        </p:txBody>
+      </p:sp>
+      <p:sp>
+        <p:nvSpPr>
+          <p:cNvPr id="19" name="Shape 17"/>
+          <p:cNvSpPr/>
+          <p:nvPr/>
+        </p:nvSpPr>
+        <p:spPr>
+          <a:xfrm>
+            <a:off x="6278728" y="1517904"/>
+            <a:ext cx="512064" cy="512064"/>
+          </a:xfrm>
+          <a:prstGeom prst="ellipse">
+            <a:avLst/>
+          </a:prstGeom>
+          <a:solidFill>
+            <a:srgbClr val="121B2D"/>
+          </a:solidFill>
+          <a:ln w="15875">
+            <a:solidFill>
+              <a:srgbClr val="3DD9EB"/>
+            </a:solidFill>
+            <a:prstDash val="solid"/>
+          </a:ln>
+        </p:spPr>
+      </p:sp>
+      <p:sp>
+        <p:nvSpPr>
+          <p:cNvPr id="20" name="Text 18"/>
+          <p:cNvSpPr/>
+          <p:nvPr/>
+        </p:nvSpPr>
+        <p:spPr>
+          <a:xfrm>
+            <a:off x="6278728" y="1517904"/>
+            <a:ext cx="512064" cy="512064"/>
+          </a:xfrm>
+          <a:prstGeom prst="rect">
+            <a:avLst/>
+          </a:prstGeom>
+          <a:noFill/>
+          <a:ln/>
+        </p:spPr>
+        <p:txBody>
+          <a:bodyPr wrap="square" lIns="0" tIns="0" rIns="0" bIns="0" rtlCol="0" anchor="ctr"/>
+          <a:lstStyle/>
+          <a:p>
+            <a:pPr algn="ctr" indent="0" marL="0">
+              <a:buNone/>
+            </a:pPr>
+            <a:r>
+              <a:rPr lang="en-US" sz="2000" b="1" dirty="0">
+                <a:solidFill>
+                  <a:srgbClr val="3DD9EB"/>
+                </a:solidFill>
+                <a:latin typeface="Calibri" pitchFamily="34" charset="0"/>
+                <a:ea typeface="Calibri" pitchFamily="34" charset="-122"/>
+                <a:cs typeface="Calibri" pitchFamily="34" charset="-120"/>
+              </a:rPr>
+              <a:t>4</a:t>
+            </a:r>
+            <a:endParaRPr lang="en-US" sz="2000" dirty="0"/>
+          </a:p>
+        </p:txBody>
+      </p:sp>
+      <p:sp>
+        <p:nvSpPr>
+          <p:cNvPr id="21" name="Text 19"/>
+          <p:cNvSpPr/>
+          <p:nvPr/>
+        </p:nvSpPr>
+        <p:spPr>
+          <a:xfrm>
+            <a:off x="6937096" y="1463040"/>
+            <a:ext cx="4797400" cy="333375"/>
+          </a:xfrm>
+          <a:prstGeom prst="rect">
+            <a:avLst/>
+          </a:prstGeom>
+          <a:noFill/>
+          <a:ln/>
+        </p:spPr>
+        <p:txBody>
+          <a:bodyPr wrap="square" lIns="0" tIns="0" rIns="0" bIns="0" rtlCol="0" anchor="ctr"/>
+          <a:lstStyle/>
+          <a:p>
+            <a:pPr indent="0" marL="0">
+              <a:buNone/>
+            </a:pPr>
+            <a:r>
+              <a:rPr lang="en-US" sz="2100" b="1" dirty="0">
+                <a:solidFill>
+                  <a:srgbClr val="F4F7FB"/>
+                </a:solidFill>
+                <a:latin typeface="Calibri" pitchFamily="34" charset="0"/>
+                <a:ea typeface="Calibri" pitchFamily="34" charset="-122"/>
+                <a:cs typeface="Calibri" pitchFamily="34" charset="-120"/>
+              </a:rPr>
+              <a:t>Batch by default</a:t>
+            </a:r>
+            <a:endParaRPr lang="en-US" sz="2100" dirty="0"/>
+          </a:p>
+        </p:txBody>
+      </p:sp>
+      <p:sp>
+        <p:nvSpPr>
+          <p:cNvPr id="22" name="Text 20"/>
+          <p:cNvSpPr/>
+          <p:nvPr/>
+        </p:nvSpPr>
+        <p:spPr>
+          <a:xfrm>
+            <a:off x="6937096" y="1842135"/>
+            <a:ext cx="4797400" cy="508000"/>
+          </a:xfrm>
+          <a:prstGeom prst="rect">
+            <a:avLst/>
+          </a:prstGeom>
+          <a:noFill/>
+          <a:ln/>
+        </p:spPr>
+        <p:txBody>
+          <a:bodyPr wrap="square" lIns="0" tIns="0" rIns="0" bIns="0" rtlCol="0" anchor="t"/>
+          <a:lstStyle/>
+          <a:p>
+            <a:pPr indent="0" marL="0">
+              <a:lnSpc>
+                <a:spcPct val="112000"/>
+              </a:lnSpc>
+              <a:buNone/>
+            </a:pPr>
+            <a:r>
+              <a:rPr lang="en-US" sz="1600" dirty="0">
+                <a:solidFill>
+                  <a:srgbClr val="91A0B7"/>
+                </a:solidFill>
+                <a:latin typeface="Calibri" pitchFamily="34" charset="0"/>
+                <a:ea typeface="Calibri" pitchFamily="34" charset="-122"/>
+                <a:cs typeface="Calibri" pitchFamily="34" charset="-120"/>
+              </a:rPr>
+              <a:t>Anything not needed in seconds goes to the batch API.</a:t>
+            </a:r>
+            <a:endParaRPr lang="en-US" sz="1600" dirty="0"/>
+          </a:p>
+        </p:txBody>
+      </p:sp>
+      <p:sp>
+        <p:nvSpPr>
+          <p:cNvPr id="23" name="Shape 21"/>
+          <p:cNvSpPr/>
+          <p:nvPr/>
+        </p:nvSpPr>
+        <p:spPr>
+          <a:xfrm>
+            <a:off x="6278728" y="2610612"/>
+            <a:ext cx="512064" cy="512064"/>
+          </a:xfrm>
+          <a:prstGeom prst="ellipse">
+            <a:avLst/>
+          </a:prstGeom>
+          <a:solidFill>
+            <a:srgbClr val="121B2D"/>
+          </a:solidFill>
+          <a:ln w="15875">
+            <a:solidFill>
+              <a:srgbClr val="3DD9EB"/>
+            </a:solidFill>
+            <a:prstDash val="solid"/>
+          </a:ln>
+        </p:spPr>
+      </p:sp>
+      <p:sp>
+        <p:nvSpPr>
+          <p:cNvPr id="24" name="Text 22"/>
+          <p:cNvSpPr/>
+          <p:nvPr/>
+        </p:nvSpPr>
+        <p:spPr>
+          <a:xfrm>
+            <a:off x="6278728" y="2610612"/>
+            <a:ext cx="512064" cy="512064"/>
+          </a:xfrm>
+          <a:prstGeom prst="rect">
+            <a:avLst/>
+          </a:prstGeom>
+          <a:noFill/>
+          <a:ln/>
+        </p:spPr>
+        <p:txBody>
+          <a:bodyPr wrap="square" lIns="0" tIns="0" rIns="0" bIns="0" rtlCol="0" anchor="ctr"/>
+          <a:lstStyle/>
+          <a:p>
+            <a:pPr algn="ctr" indent="0" marL="0">
+              <a:buNone/>
+            </a:pPr>
+            <a:r>
+              <a:rPr lang="en-US" sz="2000" b="1" dirty="0">
+                <a:solidFill>
+                  <a:srgbClr val="3DD9EB"/>
+                </a:solidFill>
+                <a:latin typeface="Calibri" pitchFamily="34" charset="0"/>
+                <a:ea typeface="Calibri" pitchFamily="34" charset="-122"/>
+                <a:cs typeface="Calibri" pitchFamily="34" charset="-120"/>
+              </a:rPr>
+              <a:t>5</a:t>
+            </a:r>
+            <a:endParaRPr lang="en-US" sz="2000" dirty="0"/>
+          </a:p>
+        </p:txBody>
+      </p:sp>
+      <p:sp>
+        <p:nvSpPr>
+          <p:cNvPr id="25" name="Text 23"/>
+          <p:cNvSpPr/>
+          <p:nvPr/>
+        </p:nvSpPr>
+        <p:spPr>
+          <a:xfrm>
+            <a:off x="6937096" y="2555748"/>
+            <a:ext cx="4797400" cy="333375"/>
+          </a:xfrm>
+          <a:prstGeom prst="rect">
+            <a:avLst/>
+          </a:prstGeom>
+          <a:noFill/>
+          <a:ln/>
+        </p:spPr>
+        <p:txBody>
+          <a:bodyPr wrap="square" lIns="0" tIns="0" rIns="0" bIns="0" rtlCol="0" anchor="ctr"/>
+          <a:lstStyle/>
+          <a:p>
+            <a:pPr indent="0" marL="0">
+              <a:buNone/>
+            </a:pPr>
+            <a:r>
+              <a:rPr lang="en-US" sz="2100" b="1" dirty="0">
+                <a:solidFill>
+                  <a:srgbClr val="F4F7FB"/>
+                </a:solidFill>
+                <a:latin typeface="Calibri" pitchFamily="34" charset="0"/>
+                <a:ea typeface="Calibri" pitchFamily="34" charset="-122"/>
+                <a:cs typeface="Calibri" pitchFamily="34" charset="-120"/>
+              </a:rPr>
+              <a:t>Monthly Copilot review</a:t>
+            </a:r>
+            <a:endParaRPr lang="en-US" sz="2100" dirty="0"/>
+          </a:p>
+        </p:txBody>
+      </p:sp>
+      <p:sp>
+        <p:nvSpPr>
+          <p:cNvPr id="26" name="Text 24"/>
+          <p:cNvSpPr/>
+          <p:nvPr/>
+        </p:nvSpPr>
+        <p:spPr>
+          <a:xfrm>
+            <a:off x="6937096" y="2934843"/>
+            <a:ext cx="4797400" cy="508000"/>
+          </a:xfrm>
+          <a:prstGeom prst="rect">
+            <a:avLst/>
+          </a:prstGeom>
+          <a:noFill/>
+          <a:ln/>
+        </p:spPr>
+        <p:txBody>
+          <a:bodyPr wrap="square" lIns="0" tIns="0" rIns="0" bIns="0" rtlCol="0" anchor="t"/>
+          <a:lstStyle/>
+          <a:p>
+            <a:pPr indent="0" marL="0">
+              <a:lnSpc>
+                <a:spcPct val="112000"/>
+              </a:lnSpc>
+              <a:buNone/>
+            </a:pPr>
+            <a:r>
+              <a:rPr lang="en-US" sz="1600" dirty="0">
+                <a:solidFill>
+                  <a:srgbClr val="91A0B7"/>
+                </a:solidFill>
+                <a:latin typeface="Calibri" pitchFamily="34" charset="0"/>
+                <a:ea typeface="Calibri" pitchFamily="34" charset="-122"/>
+                <a:cs typeface="Calibri" pitchFamily="34" charset="-120"/>
+              </a:rPr>
+              <a:t>Reclaim idle seats; report acceptance rate, not seat count.</a:t>
+            </a:r>
+            <a:endParaRPr lang="en-US" sz="1600" dirty="0"/>
+          </a:p>
+        </p:txBody>
+      </p:sp>
+      <p:sp>
+        <p:nvSpPr>
+          <p:cNvPr id="27" name="Shape 25"/>
+          <p:cNvSpPr/>
+          <p:nvPr/>
+        </p:nvSpPr>
+        <p:spPr>
+          <a:xfrm>
+            <a:off x="6278728" y="3703320"/>
+            <a:ext cx="512064" cy="512064"/>
+          </a:xfrm>
+          <a:prstGeom prst="ellipse">
+            <a:avLst/>
+          </a:prstGeom>
+          <a:solidFill>
+            <a:srgbClr val="121B2D"/>
+          </a:solidFill>
+          <a:ln w="15875">
+            <a:solidFill>
+              <a:srgbClr val="3DD9EB"/>
+            </a:solidFill>
+            <a:prstDash val="solid"/>
+          </a:ln>
+        </p:spPr>
+      </p:sp>
+      <p:sp>
+        <p:nvSpPr>
+          <p:cNvPr id="28" name="Text 26"/>
+          <p:cNvSpPr/>
+          <p:nvPr/>
+        </p:nvSpPr>
+        <p:spPr>
+          <a:xfrm>
+            <a:off x="6278728" y="3703320"/>
+            <a:ext cx="512064" cy="512064"/>
+          </a:xfrm>
+          <a:prstGeom prst="rect">
+            <a:avLst/>
+          </a:prstGeom>
+          <a:noFill/>
+          <a:ln/>
+        </p:spPr>
+        <p:txBody>
+          <a:bodyPr wrap="square" lIns="0" tIns="0" rIns="0" bIns="0" rtlCol="0" anchor="ctr"/>
+          <a:lstStyle/>
+          <a:p>
+            <a:pPr algn="ctr" indent="0" marL="0">
+              <a:buNone/>
+            </a:pPr>
+            <a:r>
+              <a:rPr lang="en-US" sz="2000" b="1" dirty="0">
+                <a:solidFill>
+                  <a:srgbClr val="3DD9EB"/>
+                </a:solidFill>
+                <a:latin typeface="Calibri" pitchFamily="34" charset="0"/>
+                <a:ea typeface="Calibri" pitchFamily="34" charset="-122"/>
+                <a:cs typeface="Calibri" pitchFamily="34" charset="-120"/>
+              </a:rPr>
+              <a:t>6</a:t>
+            </a:r>
+            <a:endParaRPr lang="en-US" sz="2000" dirty="0"/>
+          </a:p>
+        </p:txBody>
+      </p:sp>
+      <p:sp>
+        <p:nvSpPr>
+          <p:cNvPr id="29" name="Text 27"/>
+          <p:cNvSpPr/>
+          <p:nvPr/>
+        </p:nvSpPr>
+        <p:spPr>
+          <a:xfrm>
+            <a:off x="6937096" y="3648456"/>
+            <a:ext cx="4797400" cy="333375"/>
+          </a:xfrm>
+          <a:prstGeom prst="rect">
+            <a:avLst/>
+          </a:prstGeom>
+          <a:noFill/>
+          <a:ln/>
+        </p:spPr>
+        <p:txBody>
+          <a:bodyPr wrap="square" lIns="0" tIns="0" rIns="0" bIns="0" rtlCol="0" anchor="ctr"/>
+          <a:lstStyle/>
+          <a:p>
+            <a:pPr indent="0" marL="0">
+              <a:buNone/>
+            </a:pPr>
+            <a:r>
+              <a:rPr lang="en-US" sz="2100" b="1" dirty="0">
+                <a:solidFill>
+                  <a:srgbClr val="F4F7FB"/>
+                </a:solidFill>
+                <a:latin typeface="Calibri" pitchFamily="34" charset="0"/>
+                <a:ea typeface="Calibri" pitchFamily="34" charset="-122"/>
+                <a:cs typeface="Calibri" pitchFamily="34" charset="-120"/>
+              </a:rPr>
+              <a:t>Name an owner per platform</a:t>
+            </a:r>
+            <a:endParaRPr lang="en-US" sz="2100" dirty="0"/>
+          </a:p>
+        </p:txBody>
+      </p:sp>
+      <p:sp>
+        <p:nvSpPr>
+          <p:cNvPr id="30" name="Text 28"/>
+          <p:cNvSpPr/>
+          <p:nvPr/>
+        </p:nvSpPr>
+        <p:spPr>
+          <a:xfrm>
+            <a:off x="6937096" y="4027551"/>
+            <a:ext cx="4797400" cy="508000"/>
+          </a:xfrm>
+          <a:prstGeom prst="rect">
+            <a:avLst/>
+          </a:prstGeom>
+          <a:noFill/>
+          <a:ln/>
+        </p:spPr>
+        <p:txBody>
+          <a:bodyPr wrap="square" lIns="0" tIns="0" rIns="0" bIns="0" rtlCol="0" anchor="t"/>
+          <a:lstStyle/>
+          <a:p>
+            <a:pPr indent="0" marL="0">
+              <a:lnSpc>
+                <a:spcPct val="112000"/>
+              </a:lnSpc>
+              <a:buNone/>
+            </a:pPr>
+            <a:r>
+              <a:rPr lang="en-US" sz="1600" dirty="0">
+                <a:solidFill>
+                  <a:srgbClr val="91A0B7"/>
+                </a:solidFill>
+                <a:latin typeface="Calibri" pitchFamily="34" charset="0"/>
+                <a:ea typeface="Calibri" pitchFamily="34" charset="-122"/>
+                <a:cs typeface="Calibri" pitchFamily="34" charset="-120"/>
+              </a:rPr>
+              <a:t>Bedrock, Copilot and Foundry each need one.</a:t>
+            </a:r>
+            <a:endParaRPr lang="en-US" sz="1600" dirty="0"/>
+          </a:p>
+        </p:txBody>
+      </p:sp>
+      <p:sp>
+        <p:nvSpPr>
+          <p:cNvPr id="31" name="Shape 29"/>
+          <p:cNvSpPr/>
+          <p:nvPr/>
+        </p:nvSpPr>
+        <p:spPr>
+          <a:xfrm>
+            <a:off x="457200" y="5015484"/>
+            <a:ext cx="11277295" cy="1248156"/>
+          </a:xfrm>
+          <a:prstGeom prst="roundRect">
+            <a:avLst>
+              <a:gd name="adj" fmla="val 4396"/>
+            </a:avLst>
           </a:prstGeom>
           <a:solidFill>
             <a:srgbClr val="121B2D"/>
@@ -2218,14 +3090,14 @@
       </p:sp>
       <p:sp>
         <p:nvSpPr>
-          <p:cNvPr id="8" name="Text 6"/>
-          <p:cNvSpPr/>
-          <p:nvPr/>
-        </p:nvSpPr>
-        <p:spPr>
-          <a:xfrm>
-            <a:off x="457200" y="1536192"/>
-            <a:ext cx="329184" cy="329184"/>
+          <p:cNvPr id="32" name="Text 30"/>
+          <p:cNvSpPr/>
+          <p:nvPr/>
+        </p:nvSpPr>
+        <p:spPr>
+          <a:xfrm>
+            <a:off x="713232" y="5161788"/>
+            <a:ext cx="10765231" cy="422402"/>
           </a:xfrm>
           <a:prstGeom prst="rect">
             <a:avLst/>
@@ -2237,50 +3109,11 @@
           <a:bodyPr wrap="square" lIns="0" tIns="0" rIns="0" bIns="0" rtlCol="0" anchor="ctr"/>
           <a:lstStyle/>
           <a:p>
-            <a:pPr algn="ctr" indent="0" marL="0">
-              <a:buNone/>
-            </a:pPr>
-            <a:r>
-              <a:rPr lang="en-US" sz="1300" b="1" dirty="0">
-                <a:solidFill>
-                  <a:srgbClr val="3DD9EB"/>
-                </a:solidFill>
-                <a:latin typeface="Calibri" pitchFamily="34" charset="0"/>
-                <a:ea typeface="Calibri" pitchFamily="34" charset="-122"/>
-                <a:cs typeface="Calibri" pitchFamily="34" charset="-120"/>
-              </a:rPr>
-              <a:t>1</a:t>
-            </a:r>
-            <a:endParaRPr lang="en-US" sz="1300" dirty="0"/>
-          </a:p>
-        </p:txBody>
-      </p:sp>
-      <p:sp>
-        <p:nvSpPr>
-          <p:cNvPr id="9" name="Text 7"/>
-          <p:cNvSpPr/>
-          <p:nvPr/>
-        </p:nvSpPr>
-        <p:spPr>
-          <a:xfrm>
-            <a:off x="914400" y="1481328"/>
-            <a:ext cx="4998568" cy="256032"/>
-          </a:xfrm>
-          <a:prstGeom prst="rect">
-            <a:avLst/>
-          </a:prstGeom>
-          <a:noFill/>
-          <a:ln/>
-        </p:spPr>
-        <p:txBody>
-          <a:bodyPr wrap="square" lIns="0" tIns="0" rIns="0" bIns="0" rtlCol="0" anchor="ctr"/>
-          <a:lstStyle/>
-          <a:p>
             <a:pPr indent="0" marL="0">
               <a:buNone/>
             </a:pPr>
             <a:r>
-              <a:rPr lang="en-US" sz="1400" b="1" dirty="0">
+              <a:rPr lang="en-US" sz="2200" b="1" dirty="0">
                 <a:solidFill>
                   <a:srgbClr val="F4F7FB"/>
                 </a:solidFill>
@@ -2288,22 +3121,22 @@
                 <a:ea typeface="Calibri" pitchFamily="34" charset="-122"/>
                 <a:cs typeface="Calibri" pitchFamily="34" charset="-120"/>
               </a:rPr>
-              <a:t>Adopt the one-page policy</a:t>
-            </a:r>
-            <a:endParaRPr lang="en-US" sz="1400" dirty="0"/>
-          </a:p>
-        </p:txBody>
-      </p:sp>
-      <p:sp>
-        <p:nvSpPr>
-          <p:cNvPr id="10" name="Text 8"/>
-          <p:cNvSpPr/>
-          <p:nvPr/>
-        </p:nvSpPr>
-        <p:spPr>
-          <a:xfrm>
-            <a:off x="914400" y="1737360"/>
-            <a:ext cx="4998568" cy="365760"/>
+              <a:t>Reassess before 31 August 2026</a:t>
+            </a:r>
+            <a:endParaRPr lang="en-US" sz="2200" dirty="0"/>
+          </a:p>
+        </p:txBody>
+      </p:sp>
+      <p:sp>
+        <p:nvSpPr>
+          <p:cNvPr id="33" name="Text 31"/>
+          <p:cNvSpPr/>
+          <p:nvPr/>
+        </p:nvSpPr>
+        <p:spPr>
+          <a:xfrm>
+            <a:off x="713232" y="5584190"/>
+            <a:ext cx="10765231" cy="533146"/>
           </a:xfrm>
           <a:prstGeom prst="rect">
             <a:avLst/>
@@ -2317,12 +3150,12 @@
           <a:p>
             <a:pPr indent="0" marL="0">
               <a:lnSpc>
-                <a:spcPct val="110000"/>
+                <a:spcPct val="118000"/>
               </a:lnSpc>
               <a:buNone/>
             </a:pPr>
             <a:r>
-              <a:rPr lang="en-US" sz="1200" dirty="0">
+              <a:rPr lang="en-US" sz="1600" dirty="0">
                 <a:solidFill>
                   <a:srgbClr val="91A0B7"/>
                 </a:solidFill>
@@ -2330,842 +3163,9 @@
                 <a:ea typeface="Calibri" pitchFamily="34" charset="-122"/>
                 <a:cs typeface="Calibri" pitchFamily="34" charset="-120"/>
               </a:rPr>
-              <a:t>As the default for every team building on AI.</a:t>
-            </a:r>
-            <a:endParaRPr lang="en-US" sz="1200" dirty="0"/>
-          </a:p>
-        </p:txBody>
-      </p:sp>
-      <p:sp>
-        <p:nvSpPr>
-          <p:cNvPr id="11" name="Shape 9"/>
-          <p:cNvSpPr/>
-          <p:nvPr/>
-        </p:nvSpPr>
-        <p:spPr>
-          <a:xfrm>
-            <a:off x="457200" y="2194560"/>
-            <a:ext cx="329184" cy="329184"/>
-          </a:xfrm>
-          <a:prstGeom prst="ellipse">
-            <a:avLst/>
-          </a:prstGeom>
-          <a:solidFill>
-            <a:srgbClr val="121B2D"/>
-          </a:solidFill>
-          <a:ln w="12700">
-            <a:solidFill>
-              <a:srgbClr val="3DD9EB"/>
-            </a:solidFill>
-            <a:prstDash val="solid"/>
-          </a:ln>
-        </p:spPr>
-      </p:sp>
-      <p:sp>
-        <p:nvSpPr>
-          <p:cNvPr id="12" name="Text 10"/>
-          <p:cNvSpPr/>
-          <p:nvPr/>
-        </p:nvSpPr>
-        <p:spPr>
-          <a:xfrm>
-            <a:off x="457200" y="2194560"/>
-            <a:ext cx="329184" cy="329184"/>
-          </a:xfrm>
-          <a:prstGeom prst="rect">
-            <a:avLst/>
-          </a:prstGeom>
-          <a:noFill/>
-          <a:ln/>
-        </p:spPr>
-        <p:txBody>
-          <a:bodyPr wrap="square" lIns="0" tIns="0" rIns="0" bIns="0" rtlCol="0" anchor="ctr"/>
-          <a:lstStyle/>
-          <a:p>
-            <a:pPr algn="ctr" indent="0" marL="0">
-              <a:buNone/>
-            </a:pPr>
-            <a:r>
-              <a:rPr lang="en-US" sz="1300" b="1" dirty="0">
-                <a:solidFill>
-                  <a:srgbClr val="3DD9EB"/>
-                </a:solidFill>
-                <a:latin typeface="Calibri" pitchFamily="34" charset="0"/>
-                <a:ea typeface="Calibri" pitchFamily="34" charset="-122"/>
-                <a:cs typeface="Calibri" pitchFamily="34" charset="-120"/>
-              </a:rPr>
-              <a:t>2</a:t>
-            </a:r>
-            <a:endParaRPr lang="en-US" sz="1300" dirty="0"/>
-          </a:p>
-        </p:txBody>
-      </p:sp>
-      <p:sp>
-        <p:nvSpPr>
-          <p:cNvPr id="13" name="Text 11"/>
-          <p:cNvSpPr/>
-          <p:nvPr/>
-        </p:nvSpPr>
-        <p:spPr>
-          <a:xfrm>
-            <a:off x="914400" y="2139696"/>
-            <a:ext cx="4998568" cy="256032"/>
-          </a:xfrm>
-          <a:prstGeom prst="rect">
-            <a:avLst/>
-          </a:prstGeom>
-          <a:noFill/>
-          <a:ln/>
-        </p:spPr>
-        <p:txBody>
-          <a:bodyPr wrap="square" lIns="0" tIns="0" rIns="0" bIns="0" rtlCol="0" anchor="ctr"/>
-          <a:lstStyle/>
-          <a:p>
-            <a:pPr indent="0" marL="0">
-              <a:buNone/>
-            </a:pPr>
-            <a:r>
-              <a:rPr lang="en-US" sz="1400" b="1" dirty="0">
-                <a:solidFill>
-                  <a:srgbClr val="F4F7FB"/>
-                </a:solidFill>
-                <a:latin typeface="Calibri" pitchFamily="34" charset="0"/>
-                <a:ea typeface="Calibri" pitchFamily="34" charset="-122"/>
-                <a:cs typeface="Calibri" pitchFamily="34" charset="-120"/>
-              </a:rPr>
-              <a:t>Set the tier default</a:t>
-            </a:r>
-            <a:endParaRPr lang="en-US" sz="1400" dirty="0"/>
-          </a:p>
-        </p:txBody>
-      </p:sp>
-      <p:sp>
-        <p:nvSpPr>
-          <p:cNvPr id="14" name="Text 12"/>
-          <p:cNvSpPr/>
-          <p:nvPr/>
-        </p:nvSpPr>
-        <p:spPr>
-          <a:xfrm>
-            <a:off x="914400" y="2395728"/>
-            <a:ext cx="4998568" cy="365760"/>
-          </a:xfrm>
-          <a:prstGeom prst="rect">
-            <a:avLst/>
-          </a:prstGeom>
-          <a:noFill/>
-          <a:ln/>
-        </p:spPr>
-        <p:txBody>
-          <a:bodyPr wrap="square" lIns="0" tIns="0" rIns="0" bIns="0" rtlCol="0" anchor="t"/>
-          <a:lstStyle/>
-          <a:p>
-            <a:pPr indent="0" marL="0">
-              <a:lnSpc>
-                <a:spcPct val="110000"/>
-              </a:lnSpc>
-              <a:buNone/>
-            </a:pPr>
-            <a:r>
-              <a:rPr lang="en-US" sz="1200" dirty="0">
-                <a:solidFill>
-                  <a:srgbClr val="91A0B7"/>
-                </a:solidFill>
-                <a:latin typeface="Calibri" pitchFamily="34" charset="0"/>
-                <a:ea typeface="Calibri" pitchFamily="34" charset="-122"/>
-                <a:cs typeface="Calibri" pitchFamily="34" charset="-120"/>
-              </a:rPr>
-              <a:t>Balanced tier standard; top tier by exception, with evidence.</a:t>
-            </a:r>
-            <a:endParaRPr lang="en-US" sz="1200" dirty="0"/>
-          </a:p>
-        </p:txBody>
-      </p:sp>
-      <p:sp>
-        <p:nvSpPr>
-          <p:cNvPr id="15" name="Shape 13"/>
-          <p:cNvSpPr/>
-          <p:nvPr/>
-        </p:nvSpPr>
-        <p:spPr>
-          <a:xfrm>
-            <a:off x="457200" y="2852928"/>
-            <a:ext cx="329184" cy="329184"/>
-          </a:xfrm>
-          <a:prstGeom prst="ellipse">
-            <a:avLst/>
-          </a:prstGeom>
-          <a:solidFill>
-            <a:srgbClr val="121B2D"/>
-          </a:solidFill>
-          <a:ln w="12700">
-            <a:solidFill>
-              <a:srgbClr val="3DD9EB"/>
-            </a:solidFill>
-            <a:prstDash val="solid"/>
-          </a:ln>
-        </p:spPr>
-      </p:sp>
-      <p:sp>
-        <p:nvSpPr>
-          <p:cNvPr id="16" name="Text 14"/>
-          <p:cNvSpPr/>
-          <p:nvPr/>
-        </p:nvSpPr>
-        <p:spPr>
-          <a:xfrm>
-            <a:off x="457200" y="2852928"/>
-            <a:ext cx="329184" cy="329184"/>
-          </a:xfrm>
-          <a:prstGeom prst="rect">
-            <a:avLst/>
-          </a:prstGeom>
-          <a:noFill/>
-          <a:ln/>
-        </p:spPr>
-        <p:txBody>
-          <a:bodyPr wrap="square" lIns="0" tIns="0" rIns="0" bIns="0" rtlCol="0" anchor="ctr"/>
-          <a:lstStyle/>
-          <a:p>
-            <a:pPr algn="ctr" indent="0" marL="0">
-              <a:buNone/>
-            </a:pPr>
-            <a:r>
-              <a:rPr lang="en-US" sz="1300" b="1" dirty="0">
-                <a:solidFill>
-                  <a:srgbClr val="3DD9EB"/>
-                </a:solidFill>
-                <a:latin typeface="Calibri" pitchFamily="34" charset="0"/>
-                <a:ea typeface="Calibri" pitchFamily="34" charset="-122"/>
-                <a:cs typeface="Calibri" pitchFamily="34" charset="-120"/>
-              </a:rPr>
-              <a:t>3</a:t>
-            </a:r>
-            <a:endParaRPr lang="en-US" sz="1300" dirty="0"/>
-          </a:p>
-        </p:txBody>
-      </p:sp>
-      <p:sp>
-        <p:nvSpPr>
-          <p:cNvPr id="17" name="Text 15"/>
-          <p:cNvSpPr/>
-          <p:nvPr/>
-        </p:nvSpPr>
-        <p:spPr>
-          <a:xfrm>
-            <a:off x="914400" y="2798064"/>
-            <a:ext cx="4998568" cy="256032"/>
-          </a:xfrm>
-          <a:prstGeom prst="rect">
-            <a:avLst/>
-          </a:prstGeom>
-          <a:noFill/>
-          <a:ln/>
-        </p:spPr>
-        <p:txBody>
-          <a:bodyPr wrap="square" lIns="0" tIns="0" rIns="0" bIns="0" rtlCol="0" anchor="ctr"/>
-          <a:lstStyle/>
-          <a:p>
-            <a:pPr indent="0" marL="0">
-              <a:buNone/>
-            </a:pPr>
-            <a:r>
-              <a:rPr lang="en-US" sz="1400" b="1" dirty="0">
-                <a:solidFill>
-                  <a:srgbClr val="F4F7FB"/>
-                </a:solidFill>
-                <a:latin typeface="Calibri" pitchFamily="34" charset="0"/>
-                <a:ea typeface="Calibri" pitchFamily="34" charset="-122"/>
-                <a:cs typeface="Calibri" pitchFamily="34" charset="-120"/>
-              </a:rPr>
-              <a:t>Mandate caching</a:t>
-            </a:r>
-            <a:endParaRPr lang="en-US" sz="1400" dirty="0"/>
-          </a:p>
-        </p:txBody>
-      </p:sp>
-      <p:sp>
-        <p:nvSpPr>
-          <p:cNvPr id="18" name="Text 16"/>
-          <p:cNvSpPr/>
-          <p:nvPr/>
-        </p:nvSpPr>
-        <p:spPr>
-          <a:xfrm>
-            <a:off x="914400" y="3054096"/>
-            <a:ext cx="4998568" cy="365760"/>
-          </a:xfrm>
-          <a:prstGeom prst="rect">
-            <a:avLst/>
-          </a:prstGeom>
-          <a:noFill/>
-          <a:ln/>
-        </p:spPr>
-        <p:txBody>
-          <a:bodyPr wrap="square" lIns="0" tIns="0" rIns="0" bIns="0" rtlCol="0" anchor="t"/>
-          <a:lstStyle/>
-          <a:p>
-            <a:pPr indent="0" marL="0">
-              <a:lnSpc>
-                <a:spcPct val="110000"/>
-              </a:lnSpc>
-              <a:buNone/>
-            </a:pPr>
-            <a:r>
-              <a:rPr lang="en-US" sz="1200" dirty="0">
-                <a:solidFill>
-                  <a:srgbClr val="91A0B7"/>
-                </a:solidFill>
-                <a:latin typeface="Calibri" pitchFamily="34" charset="0"/>
-                <a:ea typeface="Calibri" pitchFamily="34" charset="-122"/>
-                <a:cs typeface="Calibri" pitchFamily="34" charset="-120"/>
-              </a:rPr>
-              <a:t>Stable context cached on assistants and document workloads.</a:t>
-            </a:r>
-            <a:endParaRPr lang="en-US" sz="1200" dirty="0"/>
-          </a:p>
-        </p:txBody>
-      </p:sp>
-      <p:sp>
-        <p:nvSpPr>
-          <p:cNvPr id="19" name="Shape 17"/>
-          <p:cNvSpPr/>
-          <p:nvPr/>
-        </p:nvSpPr>
-        <p:spPr>
-          <a:xfrm>
-            <a:off x="6278728" y="1536192"/>
-            <a:ext cx="329184" cy="329184"/>
-          </a:xfrm>
-          <a:prstGeom prst="ellipse">
-            <a:avLst/>
-          </a:prstGeom>
-          <a:solidFill>
-            <a:srgbClr val="121B2D"/>
-          </a:solidFill>
-          <a:ln w="12700">
-            <a:solidFill>
-              <a:srgbClr val="3DD9EB"/>
-            </a:solidFill>
-            <a:prstDash val="solid"/>
-          </a:ln>
-        </p:spPr>
-      </p:sp>
-      <p:sp>
-        <p:nvSpPr>
-          <p:cNvPr id="20" name="Text 18"/>
-          <p:cNvSpPr/>
-          <p:nvPr/>
-        </p:nvSpPr>
-        <p:spPr>
-          <a:xfrm>
-            <a:off x="6278728" y="1536192"/>
-            <a:ext cx="329184" cy="329184"/>
-          </a:xfrm>
-          <a:prstGeom prst="rect">
-            <a:avLst/>
-          </a:prstGeom>
-          <a:noFill/>
-          <a:ln/>
-        </p:spPr>
-        <p:txBody>
-          <a:bodyPr wrap="square" lIns="0" tIns="0" rIns="0" bIns="0" rtlCol="0" anchor="ctr"/>
-          <a:lstStyle/>
-          <a:p>
-            <a:pPr algn="ctr" indent="0" marL="0">
-              <a:buNone/>
-            </a:pPr>
-            <a:r>
-              <a:rPr lang="en-US" sz="1300" b="1" dirty="0">
-                <a:solidFill>
-                  <a:srgbClr val="3DD9EB"/>
-                </a:solidFill>
-                <a:latin typeface="Calibri" pitchFamily="34" charset="0"/>
-                <a:ea typeface="Calibri" pitchFamily="34" charset="-122"/>
-                <a:cs typeface="Calibri" pitchFamily="34" charset="-120"/>
-              </a:rPr>
-              <a:t>4</a:t>
-            </a:r>
-            <a:endParaRPr lang="en-US" sz="1300" dirty="0"/>
-          </a:p>
-        </p:txBody>
-      </p:sp>
-      <p:sp>
-        <p:nvSpPr>
-          <p:cNvPr id="21" name="Text 19"/>
-          <p:cNvSpPr/>
-          <p:nvPr/>
-        </p:nvSpPr>
-        <p:spPr>
-          <a:xfrm>
-            <a:off x="6735928" y="1481328"/>
-            <a:ext cx="4998568" cy="256032"/>
-          </a:xfrm>
-          <a:prstGeom prst="rect">
-            <a:avLst/>
-          </a:prstGeom>
-          <a:noFill/>
-          <a:ln/>
-        </p:spPr>
-        <p:txBody>
-          <a:bodyPr wrap="square" lIns="0" tIns="0" rIns="0" bIns="0" rtlCol="0" anchor="ctr"/>
-          <a:lstStyle/>
-          <a:p>
-            <a:pPr indent="0" marL="0">
-              <a:buNone/>
-            </a:pPr>
-            <a:r>
-              <a:rPr lang="en-US" sz="1400" b="1" dirty="0">
-                <a:solidFill>
-                  <a:srgbClr val="F4F7FB"/>
-                </a:solidFill>
-                <a:latin typeface="Calibri" pitchFamily="34" charset="0"/>
-                <a:ea typeface="Calibri" pitchFamily="34" charset="-122"/>
-                <a:cs typeface="Calibri" pitchFamily="34" charset="-120"/>
-              </a:rPr>
-              <a:t>Batch by default</a:t>
-            </a:r>
-            <a:endParaRPr lang="en-US" sz="1400" dirty="0"/>
-          </a:p>
-        </p:txBody>
-      </p:sp>
-      <p:sp>
-        <p:nvSpPr>
-          <p:cNvPr id="22" name="Text 20"/>
-          <p:cNvSpPr/>
-          <p:nvPr/>
-        </p:nvSpPr>
-        <p:spPr>
-          <a:xfrm>
-            <a:off x="6735928" y="1737360"/>
-            <a:ext cx="4998568" cy="365760"/>
-          </a:xfrm>
-          <a:prstGeom prst="rect">
-            <a:avLst/>
-          </a:prstGeom>
-          <a:noFill/>
-          <a:ln/>
-        </p:spPr>
-        <p:txBody>
-          <a:bodyPr wrap="square" lIns="0" tIns="0" rIns="0" bIns="0" rtlCol="0" anchor="t"/>
-          <a:lstStyle/>
-          <a:p>
-            <a:pPr indent="0" marL="0">
-              <a:lnSpc>
-                <a:spcPct val="110000"/>
-              </a:lnSpc>
-              <a:buNone/>
-            </a:pPr>
-            <a:r>
-              <a:rPr lang="en-US" sz="1200" dirty="0">
-                <a:solidFill>
-                  <a:srgbClr val="91A0B7"/>
-                </a:solidFill>
-                <a:latin typeface="Calibri" pitchFamily="34" charset="0"/>
-                <a:ea typeface="Calibri" pitchFamily="34" charset="-122"/>
-                <a:cs typeface="Calibri" pitchFamily="34" charset="-120"/>
-              </a:rPr>
-              <a:t>Anything not needed in seconds goes to the batch API.</a:t>
-            </a:r>
-            <a:endParaRPr lang="en-US" sz="1200" dirty="0"/>
-          </a:p>
-        </p:txBody>
-      </p:sp>
-      <p:sp>
-        <p:nvSpPr>
-          <p:cNvPr id="23" name="Shape 21"/>
-          <p:cNvSpPr/>
-          <p:nvPr/>
-        </p:nvSpPr>
-        <p:spPr>
-          <a:xfrm>
-            <a:off x="6278728" y="2194560"/>
-            <a:ext cx="329184" cy="329184"/>
-          </a:xfrm>
-          <a:prstGeom prst="ellipse">
-            <a:avLst/>
-          </a:prstGeom>
-          <a:solidFill>
-            <a:srgbClr val="121B2D"/>
-          </a:solidFill>
-          <a:ln w="12700">
-            <a:solidFill>
-              <a:srgbClr val="3DD9EB"/>
-            </a:solidFill>
-            <a:prstDash val="solid"/>
-          </a:ln>
-        </p:spPr>
-      </p:sp>
-      <p:sp>
-        <p:nvSpPr>
-          <p:cNvPr id="24" name="Text 22"/>
-          <p:cNvSpPr/>
-          <p:nvPr/>
-        </p:nvSpPr>
-        <p:spPr>
-          <a:xfrm>
-            <a:off x="6278728" y="2194560"/>
-            <a:ext cx="329184" cy="329184"/>
-          </a:xfrm>
-          <a:prstGeom prst="rect">
-            <a:avLst/>
-          </a:prstGeom>
-          <a:noFill/>
-          <a:ln/>
-        </p:spPr>
-        <p:txBody>
-          <a:bodyPr wrap="square" lIns="0" tIns="0" rIns="0" bIns="0" rtlCol="0" anchor="ctr"/>
-          <a:lstStyle/>
-          <a:p>
-            <a:pPr algn="ctr" indent="0" marL="0">
-              <a:buNone/>
-            </a:pPr>
-            <a:r>
-              <a:rPr lang="en-US" sz="1300" b="1" dirty="0">
-                <a:solidFill>
-                  <a:srgbClr val="3DD9EB"/>
-                </a:solidFill>
-                <a:latin typeface="Calibri" pitchFamily="34" charset="0"/>
-                <a:ea typeface="Calibri" pitchFamily="34" charset="-122"/>
-                <a:cs typeface="Calibri" pitchFamily="34" charset="-120"/>
-              </a:rPr>
-              <a:t>5</a:t>
-            </a:r>
-            <a:endParaRPr lang="en-US" sz="1300" dirty="0"/>
-          </a:p>
-        </p:txBody>
-      </p:sp>
-      <p:sp>
-        <p:nvSpPr>
-          <p:cNvPr id="25" name="Text 23"/>
-          <p:cNvSpPr/>
-          <p:nvPr/>
-        </p:nvSpPr>
-        <p:spPr>
-          <a:xfrm>
-            <a:off x="6735928" y="2139696"/>
-            <a:ext cx="4998568" cy="256032"/>
-          </a:xfrm>
-          <a:prstGeom prst="rect">
-            <a:avLst/>
-          </a:prstGeom>
-          <a:noFill/>
-          <a:ln/>
-        </p:spPr>
-        <p:txBody>
-          <a:bodyPr wrap="square" lIns="0" tIns="0" rIns="0" bIns="0" rtlCol="0" anchor="ctr"/>
-          <a:lstStyle/>
-          <a:p>
-            <a:pPr indent="0" marL="0">
-              <a:buNone/>
-            </a:pPr>
-            <a:r>
-              <a:rPr lang="en-US" sz="1400" b="1" dirty="0">
-                <a:solidFill>
-                  <a:srgbClr val="F4F7FB"/>
-                </a:solidFill>
-                <a:latin typeface="Calibri" pitchFamily="34" charset="0"/>
-                <a:ea typeface="Calibri" pitchFamily="34" charset="-122"/>
-                <a:cs typeface="Calibri" pitchFamily="34" charset="-120"/>
-              </a:rPr>
-              <a:t>Monthly Copilot review</a:t>
-            </a:r>
-            <a:endParaRPr lang="en-US" sz="1400" dirty="0"/>
-          </a:p>
-        </p:txBody>
-      </p:sp>
-      <p:sp>
-        <p:nvSpPr>
-          <p:cNvPr id="26" name="Text 24"/>
-          <p:cNvSpPr/>
-          <p:nvPr/>
-        </p:nvSpPr>
-        <p:spPr>
-          <a:xfrm>
-            <a:off x="6735928" y="2395728"/>
-            <a:ext cx="4998568" cy="365760"/>
-          </a:xfrm>
-          <a:prstGeom prst="rect">
-            <a:avLst/>
-          </a:prstGeom>
-          <a:noFill/>
-          <a:ln/>
-        </p:spPr>
-        <p:txBody>
-          <a:bodyPr wrap="square" lIns="0" tIns="0" rIns="0" bIns="0" rtlCol="0" anchor="t"/>
-          <a:lstStyle/>
-          <a:p>
-            <a:pPr indent="0" marL="0">
-              <a:lnSpc>
-                <a:spcPct val="110000"/>
-              </a:lnSpc>
-              <a:buNone/>
-            </a:pPr>
-            <a:r>
-              <a:rPr lang="en-US" sz="1200" dirty="0">
-                <a:solidFill>
-                  <a:srgbClr val="91A0B7"/>
-                </a:solidFill>
-                <a:latin typeface="Calibri" pitchFamily="34" charset="0"/>
-                <a:ea typeface="Calibri" pitchFamily="34" charset="-122"/>
-                <a:cs typeface="Calibri" pitchFamily="34" charset="-120"/>
-              </a:rPr>
-              <a:t>Reclaim idle seats; report acceptance rate, not seat count.</a:t>
-            </a:r>
-            <a:endParaRPr lang="en-US" sz="1200" dirty="0"/>
-          </a:p>
-        </p:txBody>
-      </p:sp>
-      <p:sp>
-        <p:nvSpPr>
-          <p:cNvPr id="27" name="Shape 25"/>
-          <p:cNvSpPr/>
-          <p:nvPr/>
-        </p:nvSpPr>
-        <p:spPr>
-          <a:xfrm>
-            <a:off x="6278728" y="2852928"/>
-            <a:ext cx="329184" cy="329184"/>
-          </a:xfrm>
-          <a:prstGeom prst="ellipse">
-            <a:avLst/>
-          </a:prstGeom>
-          <a:solidFill>
-            <a:srgbClr val="121B2D"/>
-          </a:solidFill>
-          <a:ln w="12700">
-            <a:solidFill>
-              <a:srgbClr val="3DD9EB"/>
-            </a:solidFill>
-            <a:prstDash val="solid"/>
-          </a:ln>
-        </p:spPr>
-      </p:sp>
-      <p:sp>
-        <p:nvSpPr>
-          <p:cNvPr id="28" name="Text 26"/>
-          <p:cNvSpPr/>
-          <p:nvPr/>
-        </p:nvSpPr>
-        <p:spPr>
-          <a:xfrm>
-            <a:off x="6278728" y="2852928"/>
-            <a:ext cx="329184" cy="329184"/>
-          </a:xfrm>
-          <a:prstGeom prst="rect">
-            <a:avLst/>
-          </a:prstGeom>
-          <a:noFill/>
-          <a:ln/>
-        </p:spPr>
-        <p:txBody>
-          <a:bodyPr wrap="square" lIns="0" tIns="0" rIns="0" bIns="0" rtlCol="0" anchor="ctr"/>
-          <a:lstStyle/>
-          <a:p>
-            <a:pPr algn="ctr" indent="0" marL="0">
-              <a:buNone/>
-            </a:pPr>
-            <a:r>
-              <a:rPr lang="en-US" sz="1300" b="1" dirty="0">
-                <a:solidFill>
-                  <a:srgbClr val="3DD9EB"/>
-                </a:solidFill>
-                <a:latin typeface="Calibri" pitchFamily="34" charset="0"/>
-                <a:ea typeface="Calibri" pitchFamily="34" charset="-122"/>
-                <a:cs typeface="Calibri" pitchFamily="34" charset="-120"/>
-              </a:rPr>
-              <a:t>6</a:t>
-            </a:r>
-            <a:endParaRPr lang="en-US" sz="1300" dirty="0"/>
-          </a:p>
-        </p:txBody>
-      </p:sp>
-      <p:sp>
-        <p:nvSpPr>
-          <p:cNvPr id="29" name="Text 27"/>
-          <p:cNvSpPr/>
-          <p:nvPr/>
-        </p:nvSpPr>
-        <p:spPr>
-          <a:xfrm>
-            <a:off x="6735928" y="2798064"/>
-            <a:ext cx="4998568" cy="256032"/>
-          </a:xfrm>
-          <a:prstGeom prst="rect">
-            <a:avLst/>
-          </a:prstGeom>
-          <a:noFill/>
-          <a:ln/>
-        </p:spPr>
-        <p:txBody>
-          <a:bodyPr wrap="square" lIns="0" tIns="0" rIns="0" bIns="0" rtlCol="0" anchor="ctr"/>
-          <a:lstStyle/>
-          <a:p>
-            <a:pPr indent="0" marL="0">
-              <a:buNone/>
-            </a:pPr>
-            <a:r>
-              <a:rPr lang="en-US" sz="1400" b="1" dirty="0">
-                <a:solidFill>
-                  <a:srgbClr val="F4F7FB"/>
-                </a:solidFill>
-                <a:latin typeface="Calibri" pitchFamily="34" charset="0"/>
-                <a:ea typeface="Calibri" pitchFamily="34" charset="-122"/>
-                <a:cs typeface="Calibri" pitchFamily="34" charset="-120"/>
-              </a:rPr>
-              <a:t>Name an owner per platform</a:t>
-            </a:r>
-            <a:endParaRPr lang="en-US" sz="1400" dirty="0"/>
-          </a:p>
-        </p:txBody>
-      </p:sp>
-      <p:sp>
-        <p:nvSpPr>
-          <p:cNvPr id="30" name="Text 28"/>
-          <p:cNvSpPr/>
-          <p:nvPr/>
-        </p:nvSpPr>
-        <p:spPr>
-          <a:xfrm>
-            <a:off x="6735928" y="3054096"/>
-            <a:ext cx="4998568" cy="365760"/>
-          </a:xfrm>
-          <a:prstGeom prst="rect">
-            <a:avLst/>
-          </a:prstGeom>
-          <a:noFill/>
-          <a:ln/>
-        </p:spPr>
-        <p:txBody>
-          <a:bodyPr wrap="square" lIns="0" tIns="0" rIns="0" bIns="0" rtlCol="0" anchor="t"/>
-          <a:lstStyle/>
-          <a:p>
-            <a:pPr indent="0" marL="0">
-              <a:lnSpc>
-                <a:spcPct val="110000"/>
-              </a:lnSpc>
-              <a:buNone/>
-            </a:pPr>
-            <a:r>
-              <a:rPr lang="en-US" sz="1200" dirty="0">
-                <a:solidFill>
-                  <a:srgbClr val="91A0B7"/>
-                </a:solidFill>
-                <a:latin typeface="Calibri" pitchFamily="34" charset="0"/>
-                <a:ea typeface="Calibri" pitchFamily="34" charset="-122"/>
-                <a:cs typeface="Calibri" pitchFamily="34" charset="-120"/>
-              </a:rPr>
-              <a:t>Bedrock, Copilot and Foundry each need one.</a:t>
-            </a:r>
-            <a:endParaRPr lang="en-US" sz="1200" dirty="0"/>
-          </a:p>
-        </p:txBody>
-      </p:sp>
-      <p:sp>
-        <p:nvSpPr>
-          <p:cNvPr id="31" name="Shape 29"/>
-          <p:cNvSpPr/>
-          <p:nvPr/>
-        </p:nvSpPr>
-        <p:spPr>
-          <a:xfrm>
-            <a:off x="457200" y="3621024"/>
-            <a:ext cx="11277295" cy="914400"/>
-          </a:xfrm>
-          <a:prstGeom prst="roundRect">
-            <a:avLst>
-              <a:gd name="adj" fmla="val 6000"/>
-            </a:avLst>
-          </a:prstGeom>
-          <a:solidFill>
-            <a:srgbClr val="121B2D"/>
-          </a:solidFill>
-          <a:ln w="12700">
-            <a:solidFill>
-              <a:srgbClr val="3DD9EB"/>
-            </a:solidFill>
-            <a:prstDash val="solid"/>
-          </a:ln>
-        </p:spPr>
-      </p:sp>
-      <p:sp>
-        <p:nvSpPr>
-          <p:cNvPr id="32" name="Text 30"/>
-          <p:cNvSpPr/>
-          <p:nvPr/>
-        </p:nvSpPr>
-        <p:spPr>
-          <a:xfrm>
-            <a:off x="685800" y="3749040"/>
-            <a:ext cx="10820095" cy="292608"/>
-          </a:xfrm>
-          <a:prstGeom prst="rect">
-            <a:avLst/>
-          </a:prstGeom>
-          <a:noFill/>
-          <a:ln/>
-        </p:spPr>
-        <p:txBody>
-          <a:bodyPr wrap="square" lIns="0" tIns="0" rIns="0" bIns="0" rtlCol="0" anchor="ctr"/>
-          <a:lstStyle/>
-          <a:p>
-            <a:pPr indent="0" marL="0">
-              <a:buNone/>
-            </a:pPr>
-            <a:r>
-              <a:rPr lang="en-US" sz="1600" b="1" dirty="0">
-                <a:solidFill>
-                  <a:srgbClr val="F4F7FB"/>
-                </a:solidFill>
-                <a:latin typeface="Calibri" pitchFamily="34" charset="0"/>
-                <a:ea typeface="Calibri" pitchFamily="34" charset="-122"/>
-                <a:cs typeface="Calibri" pitchFamily="34" charset="-120"/>
-              </a:rPr>
-              <a:t>Reassess before 31 August 2026</a:t>
+              <a:t>GitHub Copilot's promotional model pricing ends on that date. The tier decision should be taken and measured before it changes, not after the first invoice that reflects it.</a:t>
             </a:r>
             <a:endParaRPr lang="en-US" sz="1600" dirty="0"/>
-          </a:p>
-        </p:txBody>
-      </p:sp>
-      <p:sp>
-        <p:nvSpPr>
-          <p:cNvPr id="33" name="Text 31"/>
-          <p:cNvSpPr/>
-          <p:nvPr/>
-        </p:nvSpPr>
-        <p:spPr>
-          <a:xfrm>
-            <a:off x="685800" y="4041648"/>
-            <a:ext cx="10820095" cy="402336"/>
-          </a:xfrm>
-          <a:prstGeom prst="rect">
-            <a:avLst/>
-          </a:prstGeom>
-          <a:noFill/>
-          <a:ln/>
-        </p:spPr>
-        <p:txBody>
-          <a:bodyPr wrap="square" lIns="0" tIns="0" rIns="0" bIns="0" rtlCol="0" anchor="t"/>
-          <a:lstStyle/>
-          <a:p>
-            <a:pPr indent="0" marL="0">
-              <a:lnSpc>
-                <a:spcPct val="115000"/>
-              </a:lnSpc>
-              <a:buNone/>
-            </a:pPr>
-            <a:r>
-              <a:rPr lang="en-US" sz="1250" dirty="0">
-                <a:solidFill>
-                  <a:srgbClr val="91A0B7"/>
-                </a:solidFill>
-                <a:latin typeface="Calibri" pitchFamily="34" charset="0"/>
-                <a:ea typeface="Calibri" pitchFamily="34" charset="-122"/>
-                <a:cs typeface="Calibri" pitchFamily="34" charset="-120"/>
-              </a:rPr>
-              <a:t>GitHub Copilot's promotional model pricing ends on that date. The tier decision should be taken and measured before it changes, not after the first invoice that reflects it.</a:t>
-            </a:r>
-            <a:endParaRPr lang="en-US" sz="1250" dirty="0"/>
           </a:p>
         </p:txBody>
       </p:sp>

--- a/deck/FinOps_for_AI_CIO.pptx
+++ b/deck/FinOps_for_AI_CIO.pptx
@@ -1880,7 +1880,7 @@
         </p:nvSpPr>
         <p:spPr>
           <a:xfrm>
-            <a:off x="457200" y="2331720"/>
+            <a:off x="457200" y="2652776"/>
             <a:ext cx="8229600" cy="274320"/>
           </a:xfrm>
           <a:prstGeom prst="rect">
@@ -1919,8 +1919,8 @@
         </p:nvSpPr>
         <p:spPr>
           <a:xfrm>
-            <a:off x="457200" y="2651760"/>
-            <a:ext cx="8412480" cy="1005840"/>
+            <a:off x="457200" y="3000248"/>
+            <a:ext cx="8412480" cy="619760"/>
           </a:xfrm>
           <a:prstGeom prst="rect">
             <a:avLst/>
@@ -1958,7 +1958,7 @@
         </p:nvSpPr>
         <p:spPr>
           <a:xfrm>
-            <a:off x="457200" y="3703320"/>
+            <a:off x="457200" y="3748024"/>
             <a:ext cx="7863840" cy="457200"/>
           </a:xfrm>
           <a:prstGeom prst="rect">
@@ -1968,7 +1968,7 @@
           <a:ln/>
         </p:spPr>
         <p:txBody>
-          <a:bodyPr wrap="square" lIns="0" tIns="0" rIns="0" bIns="0" rtlCol="0" anchor="ctr"/>
+          <a:bodyPr wrap="square" lIns="0" tIns="0" rIns="0" bIns="0" rtlCol="0" anchor="t"/>
           <a:lstStyle/>
           <a:p>
             <a:pPr indent="0" marL="0">

--- a/deck/FinOps_for_AI_CIO.pptx
+++ b/deck/FinOps_for_AI_CIO.pptx
@@ -6626,7 +6626,7 @@
         <p:spPr>
           <a:xfrm>
             <a:off x="8979408" y="1929384"/>
-            <a:ext cx="2553919" cy="329184"/>
+            <a:ext cx="2553919" cy="356616"/>
           </a:xfrm>
           <a:prstGeom prst="rect">
             <a:avLst/>
@@ -6773,7 +6773,7 @@
         <p:spPr>
           <a:xfrm>
             <a:off x="8979408" y="3154680"/>
-            <a:ext cx="2553919" cy="329184"/>
+            <a:ext cx="2553919" cy="356616"/>
           </a:xfrm>
           <a:prstGeom prst="rect">
             <a:avLst/>
@@ -6920,7 +6920,7 @@
         <p:spPr>
           <a:xfrm>
             <a:off x="8979408" y="4379976"/>
-            <a:ext cx="2553919" cy="329184"/>
+            <a:ext cx="2553919" cy="356616"/>
           </a:xfrm>
           <a:prstGeom prst="rect">
             <a:avLst/>
@@ -7999,7 +7999,7 @@
         <p:spPr>
           <a:xfrm>
             <a:off x="9619488" y="1929384"/>
-            <a:ext cx="1913839" cy="329184"/>
+            <a:ext cx="1913839" cy="356616"/>
           </a:xfrm>
           <a:prstGeom prst="rect">
             <a:avLst/>
@@ -8146,7 +8146,7 @@
         <p:spPr>
           <a:xfrm>
             <a:off x="9619488" y="3154680"/>
-            <a:ext cx="1913839" cy="329184"/>
+            <a:ext cx="1913839" cy="356616"/>
           </a:xfrm>
           <a:prstGeom prst="rect">
             <a:avLst/>
@@ -8293,7 +8293,7 @@
         <p:spPr>
           <a:xfrm>
             <a:off x="9619488" y="4379976"/>
-            <a:ext cx="1913839" cy="329184"/>
+            <a:ext cx="1913839" cy="356616"/>
           </a:xfrm>
           <a:prstGeom prst="rect">
             <a:avLst/>
@@ -8642,7 +8642,7 @@
         <p:spPr>
           <a:xfrm>
             <a:off x="658368" y="1929384"/>
-            <a:ext cx="3204362" cy="329184"/>
+            <a:ext cx="3204362" cy="338328"/>
           </a:xfrm>
           <a:prstGeom prst="rect">
             <a:avLst/>
@@ -8789,7 +8789,7 @@
         <p:spPr>
           <a:xfrm>
             <a:off x="4493666" y="1929384"/>
-            <a:ext cx="3204362" cy="329184"/>
+            <a:ext cx="3204362" cy="338328"/>
           </a:xfrm>
           <a:prstGeom prst="rect">
             <a:avLst/>
@@ -8936,7 +8936,7 @@
         <p:spPr>
           <a:xfrm>
             <a:off x="8328965" y="1929384"/>
-            <a:ext cx="3204362" cy="329184"/>
+            <a:ext cx="3204362" cy="338328"/>
           </a:xfrm>
           <a:prstGeom prst="rect">
             <a:avLst/>
@@ -10324,7 +10324,7 @@
         <p:spPr>
           <a:xfrm>
             <a:off x="9436608" y="1929384"/>
-            <a:ext cx="2096719" cy="329184"/>
+            <a:ext cx="2096719" cy="356616"/>
           </a:xfrm>
           <a:prstGeom prst="rect">
             <a:avLst/>
@@ -10471,7 +10471,7 @@
         <p:spPr>
           <a:xfrm>
             <a:off x="9436608" y="3154680"/>
-            <a:ext cx="2096719" cy="329184"/>
+            <a:ext cx="2096719" cy="356616"/>
           </a:xfrm>
           <a:prstGeom prst="rect">
             <a:avLst/>
@@ -10618,7 +10618,7 @@
         <p:spPr>
           <a:xfrm>
             <a:off x="9436608" y="4379976"/>
-            <a:ext cx="2096719" cy="329184"/>
+            <a:ext cx="2096719" cy="356616"/>
           </a:xfrm>
           <a:prstGeom prst="rect">
             <a:avLst/>
@@ -11903,7 +11903,7 @@
         <p:spPr>
           <a:xfrm>
             <a:off x="9619488" y="1929384"/>
-            <a:ext cx="1913839" cy="329184"/>
+            <a:ext cx="1913839" cy="356616"/>
           </a:xfrm>
           <a:prstGeom prst="rect">
             <a:avLst/>
@@ -12050,7 +12050,7 @@
         <p:spPr>
           <a:xfrm>
             <a:off x="9619488" y="3154680"/>
-            <a:ext cx="1913839" cy="329184"/>
+            <a:ext cx="1913839" cy="356616"/>
           </a:xfrm>
           <a:prstGeom prst="rect">
             <a:avLst/>
@@ -12197,7 +12197,7 @@
         <p:spPr>
           <a:xfrm>
             <a:off x="9619488" y="4379976"/>
-            <a:ext cx="1913839" cy="329184"/>
+            <a:ext cx="1913839" cy="356616"/>
           </a:xfrm>
           <a:prstGeom prst="rect">
             <a:avLst/>

--- a/deck/FinOps_for_AI_CIO.pptx
+++ b/deck/FinOps_for_AI_CIO.pptx
@@ -2158,7 +2158,7 @@
         <p:spPr>
           <a:xfrm>
             <a:off x="8321040" y="493776"/>
-            <a:ext cx="3413455" cy="658368"/>
+            <a:ext cx="3413455" cy="731520"/>
           </a:xfrm>
           <a:prstGeom prst="rect">
             <a:avLst/>
@@ -3492,7 +3492,7 @@
         <p:spPr>
           <a:xfrm>
             <a:off x="8321040" y="493776"/>
-            <a:ext cx="3413455" cy="658368"/>
+            <a:ext cx="3413455" cy="731520"/>
           </a:xfrm>
           <a:prstGeom prst="rect">
             <a:avLst/>
@@ -4525,7 +4525,7 @@
         <p:spPr>
           <a:xfrm>
             <a:off x="8321040" y="493776"/>
-            <a:ext cx="3413455" cy="658368"/>
+            <a:ext cx="3413455" cy="731520"/>
           </a:xfrm>
           <a:prstGeom prst="rect">
             <a:avLst/>
@@ -5504,7 +5504,7 @@
         <p:spPr>
           <a:xfrm>
             <a:off x="8321040" y="493776"/>
-            <a:ext cx="3413455" cy="658368"/>
+            <a:ext cx="3413455" cy="731520"/>
           </a:xfrm>
           <a:prstGeom prst="rect">
             <a:avLst/>
@@ -7122,7 +7122,7 @@
         <p:spPr>
           <a:xfrm>
             <a:off x="8321040" y="493776"/>
-            <a:ext cx="3413455" cy="658368"/>
+            <a:ext cx="3413455" cy="731520"/>
           </a:xfrm>
           <a:prstGeom prst="rect">
             <a:avLst/>
@@ -8495,7 +8495,7 @@
         <p:spPr>
           <a:xfrm>
             <a:off x="8321040" y="493776"/>
-            <a:ext cx="3413455" cy="658368"/>
+            <a:ext cx="3413455" cy="731520"/>
           </a:xfrm>
           <a:prstGeom prst="rect">
             <a:avLst/>
@@ -9447,7 +9447,7 @@
         <p:spPr>
           <a:xfrm>
             <a:off x="8321040" y="493776"/>
-            <a:ext cx="3413455" cy="658368"/>
+            <a:ext cx="3413455" cy="731520"/>
           </a:xfrm>
           <a:prstGeom prst="rect">
             <a:avLst/>
@@ -10820,7 +10820,7 @@
         <p:spPr>
           <a:xfrm>
             <a:off x="8321040" y="493776"/>
-            <a:ext cx="3413455" cy="658368"/>
+            <a:ext cx="3413455" cy="731520"/>
           </a:xfrm>
           <a:prstGeom prst="rect">
             <a:avLst/>
@@ -12399,7 +12399,7 @@
         <p:spPr>
           <a:xfrm>
             <a:off x="8321040" y="493776"/>
-            <a:ext cx="3413455" cy="658368"/>
+            <a:ext cx="3413455" cy="731520"/>
           </a:xfrm>
           <a:prstGeom prst="rect">
             <a:avLst/>
